--- a/docs/examples/supply-chain.pptx
+++ b/docs/examples/supply-chain.pptx
@@ -7,7 +7,7 @@
   <p:sldIdLst>
     <p:sldId id="256" r:id="rId7"/>
   </p:sldIdLst>
-  <p:sldSz cx="8835505" cy="2082641" type="screen4x3"/>
+  <p:sldSz cx="8835505" cy="2091689" type="screen4x3"/>
   <p:notesSz cx="6858000" cy="9144000"/>
   <p:defaultTextStyle>
     <a:defPPr>
@@ -3097,7 +3097,7 @@
         <p:spPr>
           <a:xfrm>
             <a:off x="1436935" y="137160"/>
-            <a:ext cx="4134043" cy="1808321"/>
+            <a:ext cx="4134043" cy="1817369"/>
           </a:xfrm>
           <a:prstGeom prst="rect">
             <a:avLst/>
@@ -3142,8 +3142,8 @@
         </p:nvSpPr>
         <p:spPr>
           <a:xfrm>
-            <a:off x="137160" y="419108"/>
-            <a:ext cx="888722" cy="330024"/>
+            <a:off x="137160" y="410835"/>
+            <a:ext cx="888722" cy="355618"/>
           </a:xfrm>
           <a:prstGeom prst="ellipse">
             <a:avLst/>
@@ -3171,10 +3171,14 @@
           </a:fontRef>
         </p:style>
         <p:txBody>
-          <a:bodyPr rtlCol="0" anchor="ctr" wrap="none" tIns="0" bIns="0"/>
-          <a:lstStyle/>
-          <a:p>
-            <a:pPr algn="ctr"/>
+          <a:bodyPr rtlCol="0" anchor="ctr" wrap="none"/>
+          <a:lstStyle/>
+          <a:p>
+            <a:pPr algn="ctr">
+              <a:lnSpc>
+                <a:spcPct val="100000"/>
+              </a:lnSpc>
+            </a:pPr>
             <a:r>
               <a:rPr b="0" i="0" sz="1050">
                 <a:solidFill>
@@ -3196,7 +3200,7 @@
         </p:nvCxnSpPr>
         <p:spPr>
           <a:xfrm>
-            <a:off x="1025882" y="584120"/>
+            <a:off x="1025882" y="588644"/>
             <a:ext cx="685373" cy="0"/>
           </a:xfrm>
           <a:prstGeom prst="line">
@@ -3234,8 +3238,8 @@
         </p:nvSpPr>
         <p:spPr>
           <a:xfrm>
-            <a:off x="1117322" y="400764"/>
-            <a:ext cx="502493" cy="153352"/>
+            <a:off x="1117322" y="401954"/>
+            <a:ext cx="502493" cy="160020"/>
           </a:xfrm>
           <a:prstGeom prst="rect">
             <a:avLst/>
@@ -3248,7 +3252,11 @@
           </a:bodyPr>
           <a:lstStyle/>
           <a:p>
-            <a:pPr algn="ctr"/>
+            <a:pPr algn="ctr">
+              <a:lnSpc>
+                <a:spcPct val="100000"/>
+              </a:lnSpc>
+            </a:pPr>
             <a:r>
               <a:rPr b="0" i="0" sz="1050">
                 <a:solidFill>
@@ -3270,8 +3278,8 @@
         </p:nvSpPr>
         <p:spPr>
           <a:xfrm>
-            <a:off x="1117322" y="614124"/>
-            <a:ext cx="502493" cy="153352"/>
+            <a:off x="1117322" y="615315"/>
+            <a:ext cx="502493" cy="160020"/>
           </a:xfrm>
           <a:prstGeom prst="rect">
             <a:avLst/>
@@ -3284,7 +3292,11 @@
           </a:bodyPr>
           <a:lstStyle/>
           <a:p>
-            <a:pPr algn="ctr"/>
+            <a:pPr algn="ctr">
+              <a:lnSpc>
+                <a:spcPct val="100000"/>
+              </a:lnSpc>
+            </a:pPr>
             <a:r>
               <a:rPr b="0" i="0" sz="1050">
                 <a:solidFill>
@@ -3306,8 +3318,8 @@
         </p:nvSpPr>
         <p:spPr>
           <a:xfrm>
-            <a:off x="1711255" y="467439"/>
-            <a:ext cx="890334" cy="233362"/>
+            <a:off x="1711255" y="462914"/>
+            <a:ext cx="890334" cy="251460"/>
           </a:xfrm>
           <a:prstGeom prst="rect">
             <a:avLst/>
@@ -3335,10 +3347,14 @@
           </a:fontRef>
         </p:style>
         <p:txBody>
-          <a:bodyPr rtlCol="0" anchor="ctr" wrap="none" tIns="0" bIns="0"/>
-          <a:lstStyle/>
-          <a:p>
-            <a:pPr algn="ctr"/>
+          <a:bodyPr rtlCol="0" anchor="ctr" wrap="none"/>
+          <a:lstStyle/>
+          <a:p>
+            <a:pPr algn="ctr">
+              <a:lnSpc>
+                <a:spcPct val="100000"/>
+              </a:lnSpc>
+            </a:pPr>
             <a:r>
               <a:rPr b="0" i="0" sz="1050">
                 <a:solidFill>
@@ -3360,7 +3376,7 @@
         </p:nvCxnSpPr>
         <p:spPr>
           <a:xfrm>
-            <a:off x="2601590" y="584120"/>
+            <a:off x="2601590" y="588644"/>
             <a:ext cx="457200" cy="0"/>
           </a:xfrm>
           <a:prstGeom prst="line">
@@ -3398,8 +3414,8 @@
         </p:nvSpPr>
         <p:spPr>
           <a:xfrm>
-            <a:off x="3058790" y="467439"/>
-            <a:ext cx="890334" cy="233362"/>
+            <a:off x="3058790" y="462914"/>
+            <a:ext cx="890334" cy="251460"/>
           </a:xfrm>
           <a:prstGeom prst="rect">
             <a:avLst/>
@@ -3427,10 +3443,14 @@
           </a:fontRef>
         </p:style>
         <p:txBody>
-          <a:bodyPr rtlCol="0" anchor="ctr" wrap="square" tIns="0" bIns="0"/>
-          <a:lstStyle/>
-          <a:p>
-            <a:pPr algn="ctr"/>
+          <a:bodyPr rtlCol="0" anchor="ctr" wrap="square"/>
+          <a:lstStyle/>
+          <a:p>
+            <a:pPr algn="ctr">
+              <a:lnSpc>
+                <a:spcPct val="100000"/>
+              </a:lnSpc>
+            </a:pPr>
             <a:r>
               <a:rPr b="0" i="0" sz="1050">
                 <a:solidFill>
@@ -3452,7 +3472,7 @@
         </p:nvCxnSpPr>
         <p:spPr>
           <a:xfrm>
-            <a:off x="3949124" y="584120"/>
+            <a:off x="3949124" y="588644"/>
             <a:ext cx="457200" cy="0"/>
           </a:xfrm>
           <a:prstGeom prst="line">
@@ -3490,8 +3510,8 @@
         </p:nvSpPr>
         <p:spPr>
           <a:xfrm>
-            <a:off x="4406324" y="467439"/>
-            <a:ext cx="890334" cy="233362"/>
+            <a:off x="4406324" y="462914"/>
+            <a:ext cx="890334" cy="251460"/>
           </a:xfrm>
           <a:prstGeom prst="rect">
             <a:avLst/>
@@ -3519,10 +3539,14 @@
           </a:fontRef>
         </p:style>
         <p:txBody>
-          <a:bodyPr rtlCol="0" anchor="ctr" wrap="square" tIns="0" bIns="0"/>
-          <a:lstStyle/>
-          <a:p>
-            <a:pPr algn="ctr"/>
+          <a:bodyPr rtlCol="0" anchor="ctr" wrap="square"/>
+          <a:lstStyle/>
+          <a:p>
+            <a:pPr algn="ctr">
+              <a:lnSpc>
+                <a:spcPct val="100000"/>
+              </a:lnSpc>
+            </a:pPr>
             <a:r>
               <a:rPr b="0" i="0" sz="1050">
                 <a:solidFill>
@@ -3544,7 +3568,7 @@
         </p:nvCxnSpPr>
         <p:spPr>
           <a:xfrm>
-            <a:off x="5296659" y="584120"/>
+            <a:off x="5296659" y="588644"/>
             <a:ext cx="660966" cy="0"/>
           </a:xfrm>
           <a:prstGeom prst="line">
@@ -3582,8 +3606,8 @@
         </p:nvSpPr>
         <p:spPr>
           <a:xfrm>
-            <a:off x="5388099" y="400764"/>
-            <a:ext cx="478085" cy="153352"/>
+            <a:off x="5388099" y="401954"/>
+            <a:ext cx="478085" cy="160020"/>
           </a:xfrm>
           <a:prstGeom prst="rect">
             <a:avLst/>
@@ -3596,7 +3620,11 @@
           </a:bodyPr>
           <a:lstStyle/>
           <a:p>
-            <a:pPr algn="ctr"/>
+            <a:pPr algn="ctr">
+              <a:lnSpc>
+                <a:spcPct val="100000"/>
+              </a:lnSpc>
+            </a:pPr>
             <a:r>
               <a:rPr b="0" i="0" sz="1050">
                 <a:solidFill>
@@ -3618,8 +3646,8 @@
         </p:nvSpPr>
         <p:spPr>
           <a:xfrm>
-            <a:off x="5388099" y="614124"/>
-            <a:ext cx="478085" cy="153352"/>
+            <a:off x="5388099" y="615315"/>
+            <a:ext cx="478085" cy="160020"/>
           </a:xfrm>
           <a:prstGeom prst="rect">
             <a:avLst/>
@@ -3632,7 +3660,11 @@
           </a:bodyPr>
           <a:lstStyle/>
           <a:p>
-            <a:pPr algn="ctr"/>
+            <a:pPr algn="ctr">
+              <a:lnSpc>
+                <a:spcPct val="100000"/>
+              </a:lnSpc>
+            </a:pPr>
             <a:r>
               <a:rPr b="0" i="0" sz="1050">
                 <a:solidFill>
@@ -3654,8 +3686,8 @@
         </p:nvSpPr>
         <p:spPr>
           <a:xfrm>
-            <a:off x="5957625" y="419108"/>
-            <a:ext cx="1086568" cy="330024"/>
+            <a:off x="5957625" y="410835"/>
+            <a:ext cx="1086568" cy="355618"/>
           </a:xfrm>
           <a:prstGeom prst="ellipse">
             <a:avLst/>
@@ -3683,10 +3715,14 @@
           </a:fontRef>
         </p:style>
         <p:txBody>
-          <a:bodyPr rtlCol="0" anchor="ctr" wrap="none" tIns="0" bIns="0"/>
-          <a:lstStyle/>
-          <a:p>
-            <a:pPr algn="ctr"/>
+          <a:bodyPr rtlCol="0" anchor="ctr" wrap="none"/>
+          <a:lstStyle/>
+          <a:p>
+            <a:pPr algn="ctr">
+              <a:lnSpc>
+                <a:spcPct val="100000"/>
+              </a:lnSpc>
+            </a:pPr>
             <a:r>
               <a:rPr b="0" i="0" sz="1050">
                 <a:solidFill>
@@ -3708,7 +3744,7 @@
         </p:nvCxnSpPr>
         <p:spPr>
           <a:xfrm>
-            <a:off x="7044193" y="584120"/>
+            <a:off x="7044193" y="588644"/>
             <a:ext cx="613291" cy="0"/>
           </a:xfrm>
           <a:prstGeom prst="line">
@@ -3746,8 +3782,8 @@
         </p:nvSpPr>
         <p:spPr>
           <a:xfrm>
-            <a:off x="7135633" y="400764"/>
-            <a:ext cx="430410" cy="153352"/>
+            <a:off x="7135633" y="401954"/>
+            <a:ext cx="430410" cy="160020"/>
           </a:xfrm>
           <a:prstGeom prst="rect">
             <a:avLst/>
@@ -3760,7 +3796,11 @@
           </a:bodyPr>
           <a:lstStyle/>
           <a:p>
-            <a:pPr algn="ctr"/>
+            <a:pPr algn="ctr">
+              <a:lnSpc>
+                <a:spcPct val="100000"/>
+              </a:lnSpc>
+            </a:pPr>
             <a:r>
               <a:rPr b="0" i="0" sz="1050">
                 <a:solidFill>
@@ -3782,8 +3822,8 @@
         </p:nvSpPr>
         <p:spPr>
           <a:xfrm>
-            <a:off x="7135633" y="614124"/>
-            <a:ext cx="430410" cy="153352"/>
+            <a:off x="7135633" y="615315"/>
+            <a:ext cx="430410" cy="160020"/>
           </a:xfrm>
           <a:prstGeom prst="rect">
             <a:avLst/>
@@ -3796,7 +3836,11 @@
           </a:bodyPr>
           <a:lstStyle/>
           <a:p>
-            <a:pPr algn="ctr"/>
+            <a:pPr algn="ctr">
+              <a:lnSpc>
+                <a:spcPct val="100000"/>
+              </a:lnSpc>
+            </a:pPr>
             <a:r>
               <a:rPr b="0" i="0" sz="1050">
                 <a:solidFill>
@@ -3818,8 +3862,8 @@
         </p:nvSpPr>
         <p:spPr>
           <a:xfrm>
-            <a:off x="7657484" y="419108"/>
-            <a:ext cx="1040860" cy="330024"/>
+            <a:off x="7657484" y="410835"/>
+            <a:ext cx="1040860" cy="355618"/>
           </a:xfrm>
           <a:prstGeom prst="ellipse">
             <a:avLst/>
@@ -3847,10 +3891,14 @@
           </a:fontRef>
         </p:style>
         <p:txBody>
-          <a:bodyPr rtlCol="0" anchor="ctr" wrap="none" tIns="0" bIns="0"/>
-          <a:lstStyle/>
-          <a:p>
-            <a:pPr algn="ctr"/>
+          <a:bodyPr rtlCol="0" anchor="ctr" wrap="none"/>
+          <a:lstStyle/>
+          <a:p>
+            <a:pPr algn="ctr">
+              <a:lnSpc>
+                <a:spcPct val="100000"/>
+              </a:lnSpc>
+            </a:pPr>
             <a:r>
               <a:rPr b="0" i="0" sz="1050">
                 <a:solidFill>
@@ -3872,7 +3920,7 @@
         </p:nvSpPr>
         <p:spPr>
           <a:xfrm>
-            <a:off x="1711255" y="1269920"/>
+            <a:off x="1711255" y="1274444"/>
             <a:ext cx="3585403" cy="457200"/>
           </a:xfrm>
           <a:prstGeom prst="rect">
@@ -3901,10 +3949,14 @@
           </a:fontRef>
         </p:style>
         <p:txBody>
-          <a:bodyPr rtlCol="0" anchor="ctr" wrap="square" tIns="0" bIns="0"/>
-          <a:lstStyle/>
-          <a:p>
-            <a:pPr algn="ctr"/>
+          <a:bodyPr rtlCol="0" anchor="ctr" wrap="square"/>
+          <a:lstStyle/>
+          <a:p>
+            <a:pPr algn="ctr">
+              <a:lnSpc>
+                <a:spcPct val="100000"/>
+              </a:lnSpc>
+            </a:pPr>
             <a:r>
               <a:rPr b="0" i="0" sz="1050">
                 <a:solidFill>
@@ -3926,8 +3978,8 @@
         </p:nvCxnSpPr>
         <p:spPr>
           <a:xfrm flipV="1">
-            <a:off x="2156423" y="700801"/>
-            <a:ext cx="0" cy="569119"/>
+            <a:off x="2156423" y="714374"/>
+            <a:ext cx="0" cy="560070"/>
           </a:xfrm>
           <a:prstGeom prst="line">
             <a:avLst/>
@@ -3964,8 +4016,8 @@
         </p:nvCxnSpPr>
         <p:spPr>
           <a:xfrm flipV="1">
-            <a:off x="3503957" y="700801"/>
-            <a:ext cx="0" cy="569119"/>
+            <a:off x="3503957" y="714374"/>
+            <a:ext cx="0" cy="560070"/>
           </a:xfrm>
           <a:prstGeom prst="line">
             <a:avLst/>
@@ -4002,8 +4054,8 @@
         </p:nvCxnSpPr>
         <p:spPr>
           <a:xfrm flipV="1">
-            <a:off x="4851492" y="700801"/>
-            <a:ext cx="0" cy="569119"/>
+            <a:off x="4851492" y="714374"/>
+            <a:ext cx="0" cy="560070"/>
           </a:xfrm>
           <a:prstGeom prst="line">
             <a:avLst/>
@@ -4040,8 +4092,8 @@
         </p:nvSpPr>
         <p:spPr>
           <a:xfrm>
-            <a:off x="3152291" y="175926"/>
-            <a:ext cx="703331" cy="233362"/>
+            <a:off x="3152291" y="166878"/>
+            <a:ext cx="703331" cy="251460"/>
           </a:xfrm>
           <a:prstGeom prst="rect">
             <a:avLst/>
@@ -4067,10 +4119,14 @@
           </a:fontRef>
         </p:style>
         <p:txBody>
-          <a:bodyPr rtlCol="0" anchor="ctr" wrap="none" tIns="0" bIns="0"/>
-          <a:lstStyle/>
-          <a:p>
-            <a:pPr algn="ctr"/>
+          <a:bodyPr rtlCol="0" anchor="ctr" wrap="none"/>
+          <a:lstStyle/>
+          <a:p>
+            <a:pPr algn="ctr">
+              <a:lnSpc>
+                <a:spcPct val="100000"/>
+              </a:lnSpc>
+            </a:pPr>
             <a:r>
               <a:rPr b="1" i="0" sz="1050">
                 <a:solidFill>
